--- a/MS Fabric/CapacityMetric_Presentation.pptx
+++ b/MS Fabric/CapacityMetric_Presentation.pptx
@@ -11,16 +11,10 @@
     <p:sldId id="261" r:id="rId2"/>
     <p:sldId id="263" r:id="rId3"/>
     <p:sldId id="264" r:id="rId4"/>
-    <p:sldId id="259" r:id="rId5"/>
+    <p:sldId id="265" r:id="rId5"/>
   </p:sldIdLst>
   <p:sldSz cx="14630400" cy="8229600"/>
   <p:notesSz cx="8229600" cy="14630400"/>
-  <p:embeddedFontLst>
-    <p:embeddedFont>
-      <p:font typeface="Source Sans 3" panose="020B0604020202020204" charset="0"/>
-      <p:regular r:id="rId7"/>
-    </p:embeddedFont>
-  </p:embeddedFontLst>
   <p:defaultTextStyle>
     <a:defPPr>
       <a:defRPr lang="en-BE"/>
@@ -249,114 +243,6 @@
 </p:notesMaster>
 </file>
 
-<file path=ppt/notesSlides/notesSlide1.xml><?xml version="1.0" encoding="utf-8"?>
-<p:notes xmlns:a="http://schemas.openxmlformats.org/drawingml/2006/main" xmlns:r="http://schemas.openxmlformats.org/officeDocument/2006/relationships" xmlns:p="http://schemas.openxmlformats.org/presentationml/2006/main">
-  <p:cSld>
-    <p:spTree>
-      <p:nvGrpSpPr>
-        <p:cNvPr id="1" name="">
-          <a:extLst>
-            <a:ext uri="{FF2B5EF4-FFF2-40B4-BE49-F238E27FC236}">
-              <a16:creationId xmlns:a16="http://schemas.microsoft.com/office/drawing/2014/main" id="{E812B146-B089-1A3C-DE18-E11FD4C89476}"/>
-            </a:ext>
-          </a:extLst>
-        </p:cNvPr>
-        <p:cNvGrpSpPr/>
-        <p:nvPr/>
-      </p:nvGrpSpPr>
-      <p:grpSpPr>
-        <a:xfrm>
-          <a:off x="0" y="0"/>
-          <a:ext cx="0" cy="0"/>
-          <a:chOff x="0" y="0"/>
-          <a:chExt cx="0" cy="0"/>
-        </a:xfrm>
-      </p:grpSpPr>
-      <p:sp>
-        <p:nvSpPr>
-          <p:cNvPr id="2" name="Slide Image Placeholder 1">
-            <a:extLst>
-              <a:ext uri="{FF2B5EF4-FFF2-40B4-BE49-F238E27FC236}">
-                <a16:creationId xmlns:a16="http://schemas.microsoft.com/office/drawing/2014/main" id="{269499FE-93E0-9EFF-D647-4C0F4AC30C84}"/>
-              </a:ext>
-            </a:extLst>
-          </p:cNvPr>
-          <p:cNvSpPr>
-            <a:spLocks noGrp="1" noRot="1" noChangeAspect="1"/>
-          </p:cNvSpPr>
-          <p:nvPr>
-            <p:ph type="sldImg"/>
-          </p:nvPr>
-        </p:nvSpPr>
-        <p:spPr/>
-      </p:sp>
-      <p:sp>
-        <p:nvSpPr>
-          <p:cNvPr id="3" name="Notes Placeholder 2">
-            <a:extLst>
-              <a:ext uri="{FF2B5EF4-FFF2-40B4-BE49-F238E27FC236}">
-                <a16:creationId xmlns:a16="http://schemas.microsoft.com/office/drawing/2014/main" id="{F2611041-B452-7209-E7BE-140DC0819F32}"/>
-              </a:ext>
-            </a:extLst>
-          </p:cNvPr>
-          <p:cNvSpPr>
-            <a:spLocks noGrp="1"/>
-          </p:cNvSpPr>
-          <p:nvPr>
-            <p:ph type="body" idx="1"/>
-          </p:nvPr>
-        </p:nvSpPr>
-        <p:spPr/>
-        <p:txBody>
-          <a:bodyPr/>
-          <a:lstStyle/>
-          <a:p>
-            <a:endParaRPr lang="en-US" dirty="0"/>
-          </a:p>
-        </p:txBody>
-      </p:sp>
-      <p:sp>
-        <p:nvSpPr>
-          <p:cNvPr id="4" name="Slide Number Placeholder 3">
-            <a:extLst>
-              <a:ext uri="{FF2B5EF4-FFF2-40B4-BE49-F238E27FC236}">
-                <a16:creationId xmlns:a16="http://schemas.microsoft.com/office/drawing/2014/main" id="{90C80D91-BF1B-60CA-CECB-D1E057B3671A}"/>
-              </a:ext>
-            </a:extLst>
-          </p:cNvPr>
-          <p:cNvSpPr>
-            <a:spLocks noGrp="1"/>
-          </p:cNvSpPr>
-          <p:nvPr>
-            <p:ph type="sldNum" sz="quarter" idx="10"/>
-          </p:nvPr>
-        </p:nvSpPr>
-        <p:spPr/>
-        <p:txBody>
-          <a:bodyPr/>
-          <a:lstStyle/>
-          <a:p>
-            <a:fld id="{F7021451-1387-4CA6-816F-3879F97B5CBC}" type="slidenum">
-              <a:rPr lang="en-US"/>
-              <a:t>4</a:t>
-            </a:fld>
-            <a:endParaRPr lang="en-US"/>
-          </a:p>
-        </p:txBody>
-      </p:sp>
-    </p:spTree>
-    <p:extLst>
-      <p:ext uri="{BB962C8B-B14F-4D97-AF65-F5344CB8AC3E}">
-        <p14:creationId xmlns:p14="http://schemas.microsoft.com/office/powerpoint/2010/main" val="902444546"/>
-      </p:ext>
-    </p:extLst>
-  </p:cSld>
-  <p:clrMapOvr>
-    <a:masterClrMapping/>
-  </p:clrMapOvr>
-</p:notes>
-</file>
-
 <file path=ppt/slideLayouts/slideLayout1.xml><?xml version="1.0" encoding="utf-8"?>
 <p:sldLayout xmlns:a="http://schemas.openxmlformats.org/drawingml/2006/main" xmlns:r="http://schemas.openxmlformats.org/officeDocument/2006/relationships" xmlns:p="http://schemas.openxmlformats.org/presentationml/2006/main" preserve="1">
   <p:cSld name="DEFAULT">
@@ -619,6 +505,13 @@
           </a:solidFill>
           <a:ln/>
         </p:spPr>
+        <p:txBody>
+          <a:bodyPr/>
+          <a:lstStyle/>
+          <a:p>
+            <a:endParaRPr lang="en-BE"/>
+          </a:p>
+        </p:txBody>
       </p:sp>
       <p:sp>
         <p:nvSpPr>
@@ -639,6 +532,13 @@
           </a:solidFill>
           <a:ln/>
         </p:spPr>
+        <p:txBody>
+          <a:bodyPr/>
+          <a:lstStyle/>
+          <a:p>
+            <a:endParaRPr lang="en-BE"/>
+          </a:p>
+        </p:txBody>
       </p:sp>
       <p:pic>
         <p:nvPicPr>
@@ -2214,12 +2114,20 @@
 <file path=ppt/slides/slide4.xml><?xml version="1.0" encoding="utf-8"?>
 <p:sld xmlns:a="http://schemas.openxmlformats.org/drawingml/2006/main" xmlns:r="http://schemas.openxmlformats.org/officeDocument/2006/relationships" xmlns:p="http://schemas.openxmlformats.org/presentationml/2006/main">
   <p:cSld>
+    <p:bg>
+      <p:bgPr>
+        <a:solidFill>
+          <a:schemeClr val="bg1"/>
+        </a:solidFill>
+        <a:effectLst/>
+      </p:bgPr>
+    </p:bg>
     <p:spTree>
       <p:nvGrpSpPr>
         <p:cNvPr id="1" name="">
           <a:extLst>
             <a:ext uri="{FF2B5EF4-FFF2-40B4-BE49-F238E27FC236}">
-              <a16:creationId xmlns:a16="http://schemas.microsoft.com/office/drawing/2014/main" id="{FE2EEEA9-316D-3392-7567-0C75DE6D7201}"/>
+              <a16:creationId xmlns:a16="http://schemas.microsoft.com/office/drawing/2014/main" id="{24A95B62-6120-FCCD-0111-658CE24E6AAE}"/>
             </a:ext>
           </a:extLst>
         </p:cNvPr>
@@ -2234,12 +2142,311 @@
           <a:chExt cx="0" cy="0"/>
         </a:xfrm>
       </p:grpSpPr>
+      <p:sp useBgFill="1">
+        <p:nvSpPr>
+          <p:cNvPr id="9" name="Rectangle 8">
+            <a:extLst>
+              <a:ext uri="{FF2B5EF4-FFF2-40B4-BE49-F238E27FC236}">
+                <a16:creationId xmlns:a16="http://schemas.microsoft.com/office/drawing/2014/main" id="{F10F8D30-FE2F-363F-69EA-6866FA84D9FF}"/>
+              </a:ext>
+              <a:ext uri="{C183D7F6-B498-43B3-948B-1728B52AA6E4}">
+                <adec:decorative xmlns:adec="http://schemas.microsoft.com/office/drawing/2017/decorative" val="1"/>
+              </a:ext>
+            </a:extLst>
+          </p:cNvPr>
+          <p:cNvSpPr>
+            <a:spLocks noGrp="1" noRot="1" noChangeAspect="1" noMove="1" noResize="1" noEditPoints="1" noAdjustHandles="1" noChangeArrowheads="1" noChangeShapeType="1" noTextEdit="1"/>
+          </p:cNvSpPr>
+          <p:nvPr>
+            <p:extLst>
+              <p:ext uri="{386F3935-93C4-4BCD-93E2-E3B085C9AB24}">
+                <p16:designElem xmlns:p16="http://schemas.microsoft.com/office/powerpoint/2015/main" val="1"/>
+              </p:ext>
+            </p:extLst>
+          </p:nvPr>
+        </p:nvSpPr>
+        <p:spPr>
+          <a:xfrm>
+            <a:off x="0" y="0"/>
+            <a:ext cx="14630400" cy="8229600"/>
+          </a:xfrm>
+          <a:prstGeom prst="rect">
+            <a:avLst/>
+          </a:prstGeom>
+          <a:ln w="12700" cap="flat" cmpd="sng" algn="ctr">
+            <a:noFill/>
+            <a:prstDash val="solid"/>
+            <a:miter lim="800000"/>
+          </a:ln>
+          <a:effectLst/>
+          <a:extLst>
+            <a:ext uri="{91240B29-F687-4F45-9708-019B960494DF}">
+              <a14:hiddenLine xmlns:a14="http://schemas.microsoft.com/office/drawing/2010/main" w="12700" cap="flat" cmpd="sng" algn="ctr">
+                <a:solidFill>
+                  <a:schemeClr val="accent1">
+                    <a:shade val="50000"/>
+                  </a:schemeClr>
+                </a:solidFill>
+                <a:prstDash val="solid"/>
+                <a:miter lim="800000"/>
+              </a14:hiddenLine>
+            </a:ext>
+          </a:extLst>
+        </p:spPr>
+        <p:style>
+          <a:lnRef idx="2">
+            <a:schemeClr val="accent1">
+              <a:shade val="50000"/>
+            </a:schemeClr>
+          </a:lnRef>
+          <a:fillRef idx="1">
+            <a:schemeClr val="accent1"/>
+          </a:fillRef>
+          <a:effectRef idx="0">
+            <a:schemeClr val="accent1"/>
+          </a:effectRef>
+          <a:fontRef idx="minor">
+            <a:schemeClr val="lt1"/>
+          </a:fontRef>
+        </p:style>
+        <p:txBody>
+          <a:bodyPr rtlCol="0" anchor="ctr"/>
+          <a:lstStyle/>
+          <a:p>
+            <a:pPr algn="ctr"/>
+            <a:endParaRPr lang="en-US"/>
+          </a:p>
+        </p:txBody>
+      </p:sp>
       <p:sp>
         <p:nvSpPr>
-          <p:cNvPr id="17" name="TextBox 16">
+          <p:cNvPr id="11" name="Rectangle 10">
             <a:extLst>
               <a:ext uri="{FF2B5EF4-FFF2-40B4-BE49-F238E27FC236}">
-                <a16:creationId xmlns:a16="http://schemas.microsoft.com/office/drawing/2014/main" id="{F3D00C0E-AD0C-40F4-C92D-193D237223E0}"/>
+                <a16:creationId xmlns:a16="http://schemas.microsoft.com/office/drawing/2014/main" id="{8E7594DF-EBD6-F716-1A5D-092F8B5BF430}"/>
+              </a:ext>
+              <a:ext uri="{C183D7F6-B498-43B3-948B-1728B52AA6E4}">
+                <adec:decorative xmlns:adec="http://schemas.microsoft.com/office/drawing/2017/decorative" val="1"/>
+              </a:ext>
+            </a:extLst>
+          </p:cNvPr>
+          <p:cNvSpPr>
+            <a:spLocks noGrp="1" noRot="1" noChangeAspect="1" noMove="1" noResize="1" noEditPoints="1" noAdjustHandles="1" noChangeArrowheads="1" noChangeShapeType="1" noTextEdit="1"/>
+          </p:cNvSpPr>
+          <p:nvPr>
+            <p:extLst>
+              <p:ext uri="{386F3935-93C4-4BCD-93E2-E3B085C9AB24}">
+                <p16:designElem xmlns:p16="http://schemas.microsoft.com/office/powerpoint/2015/main" val="1"/>
+              </p:ext>
+            </p:extLst>
+          </p:nvPr>
+        </p:nvSpPr>
+        <p:spPr>
+          <a:xfrm rot="16200000" flipH="1">
+            <a:off x="3199940" y="-3199426"/>
+            <a:ext cx="8229600" cy="14629480"/>
+          </a:xfrm>
+          <a:prstGeom prst="rect">
+            <a:avLst/>
+          </a:prstGeom>
+          <a:gradFill>
+            <a:gsLst>
+              <a:gs pos="8000">
+                <a:schemeClr val="accent1"/>
+              </a:gs>
+              <a:gs pos="100000">
+                <a:schemeClr val="accent1">
+                  <a:lumMod val="50000"/>
+                </a:schemeClr>
+              </a:gs>
+            </a:gsLst>
+            <a:lin ang="12000000" scaled="0"/>
+          </a:gradFill>
+          <a:ln>
+            <a:noFill/>
+          </a:ln>
+        </p:spPr>
+        <p:style>
+          <a:lnRef idx="2">
+            <a:schemeClr val="accent1">
+              <a:shade val="50000"/>
+            </a:schemeClr>
+          </a:lnRef>
+          <a:fillRef idx="1">
+            <a:schemeClr val="accent1"/>
+          </a:fillRef>
+          <a:effectRef idx="0">
+            <a:schemeClr val="accent1"/>
+          </a:effectRef>
+          <a:fontRef idx="minor">
+            <a:schemeClr val="lt1"/>
+          </a:fontRef>
+        </p:style>
+        <p:txBody>
+          <a:bodyPr rtlCol="0" anchor="ctr"/>
+          <a:lstStyle/>
+          <a:p>
+            <a:pPr algn="ctr"/>
+            <a:endParaRPr lang="en-US"/>
+          </a:p>
+        </p:txBody>
+      </p:sp>
+      <p:sp>
+        <p:nvSpPr>
+          <p:cNvPr id="13" name="Rectangle 12">
+            <a:extLst>
+              <a:ext uri="{FF2B5EF4-FFF2-40B4-BE49-F238E27FC236}">
+                <a16:creationId xmlns:a16="http://schemas.microsoft.com/office/drawing/2014/main" id="{9185604C-D44F-2905-0364-A960C48B93ED}"/>
+              </a:ext>
+              <a:ext uri="{C183D7F6-B498-43B3-948B-1728B52AA6E4}">
+                <adec:decorative xmlns:adec="http://schemas.microsoft.com/office/drawing/2017/decorative" val="1"/>
+              </a:ext>
+            </a:extLst>
+          </p:cNvPr>
+          <p:cNvSpPr>
+            <a:spLocks noGrp="1" noRot="1" noChangeAspect="1" noMove="1" noResize="1" noEditPoints="1" noAdjustHandles="1" noChangeArrowheads="1" noChangeShapeType="1" noTextEdit="1"/>
+          </p:cNvSpPr>
+          <p:nvPr>
+            <p:extLst>
+              <p:ext uri="{386F3935-93C4-4BCD-93E2-E3B085C9AB24}">
+                <p16:designElem xmlns:p16="http://schemas.microsoft.com/office/powerpoint/2015/main" val="1"/>
+              </p:ext>
+            </p:extLst>
+          </p:nvPr>
+        </p:nvSpPr>
+        <p:spPr>
+          <a:xfrm rot="10800000" flipH="1">
+            <a:off x="-2773" y="0"/>
+            <a:ext cx="10885015" cy="8229086"/>
+          </a:xfrm>
+          <a:prstGeom prst="rect">
+            <a:avLst/>
+          </a:prstGeom>
+          <a:gradFill>
+            <a:gsLst>
+              <a:gs pos="8000">
+                <a:srgbClr val="000000">
+                  <a:alpha val="52000"/>
+                </a:srgbClr>
+              </a:gs>
+              <a:gs pos="100000">
+                <a:schemeClr val="accent1"/>
+              </a:gs>
+            </a:gsLst>
+            <a:lin ang="4800000" scaled="0"/>
+          </a:gradFill>
+          <a:ln>
+            <a:noFill/>
+          </a:ln>
+        </p:spPr>
+        <p:style>
+          <a:lnRef idx="2">
+            <a:schemeClr val="accent1">
+              <a:shade val="50000"/>
+            </a:schemeClr>
+          </a:lnRef>
+          <a:fillRef idx="1">
+            <a:schemeClr val="accent1"/>
+          </a:fillRef>
+          <a:effectRef idx="0">
+            <a:schemeClr val="accent1"/>
+          </a:effectRef>
+          <a:fontRef idx="minor">
+            <a:schemeClr val="lt1"/>
+          </a:fontRef>
+        </p:style>
+        <p:txBody>
+          <a:bodyPr rtlCol="0" anchor="ctr"/>
+          <a:lstStyle/>
+          <a:p>
+            <a:pPr algn="ctr"/>
+            <a:endParaRPr lang="en-US"/>
+          </a:p>
+        </p:txBody>
+      </p:sp>
+      <p:sp>
+        <p:nvSpPr>
+          <p:cNvPr id="15" name="Rectangle 14">
+            <a:extLst>
+              <a:ext uri="{FF2B5EF4-FFF2-40B4-BE49-F238E27FC236}">
+                <a16:creationId xmlns:a16="http://schemas.microsoft.com/office/drawing/2014/main" id="{C17E1293-23BA-E9B8-9A8F-B1F624BB511E}"/>
+              </a:ext>
+              <a:ext uri="{C183D7F6-B498-43B3-948B-1728B52AA6E4}">
+                <adec:decorative xmlns:adec="http://schemas.microsoft.com/office/drawing/2017/decorative" val="1"/>
+              </a:ext>
+            </a:extLst>
+          </p:cNvPr>
+          <p:cNvSpPr>
+            <a:spLocks noGrp="1" noRot="1" noChangeAspect="1" noMove="1" noResize="1" noEditPoints="1" noAdjustHandles="1" noChangeArrowheads="1" noChangeShapeType="1" noTextEdit="1"/>
+          </p:cNvSpPr>
+          <p:nvPr>
+            <p:extLst>
+              <p:ext uri="{386F3935-93C4-4BCD-93E2-E3B085C9AB24}">
+                <p16:designElem xmlns:p16="http://schemas.microsoft.com/office/powerpoint/2015/main" val="1"/>
+              </p:ext>
+            </p:extLst>
+          </p:nvPr>
+        </p:nvSpPr>
+        <p:spPr>
+          <a:xfrm rot="16200000" flipH="1">
+            <a:off x="4379389" y="-2023008"/>
+            <a:ext cx="5873477" cy="14632255"/>
+          </a:xfrm>
+          <a:prstGeom prst="rect">
+            <a:avLst/>
+          </a:prstGeom>
+          <a:gradFill>
+            <a:gsLst>
+              <a:gs pos="0">
+                <a:schemeClr val="accent5">
+                  <a:lumMod val="60000"/>
+                  <a:lumOff val="40000"/>
+                  <a:alpha val="0"/>
+                </a:schemeClr>
+              </a:gs>
+              <a:gs pos="100000">
+                <a:srgbClr val="000000">
+                  <a:alpha val="46000"/>
+                </a:srgbClr>
+              </a:gs>
+            </a:gsLst>
+            <a:lin ang="1200000" scaled="0"/>
+          </a:gradFill>
+          <a:ln>
+            <a:noFill/>
+          </a:ln>
+        </p:spPr>
+        <p:style>
+          <a:lnRef idx="2">
+            <a:schemeClr val="accent1">
+              <a:shade val="50000"/>
+            </a:schemeClr>
+          </a:lnRef>
+          <a:fillRef idx="1">
+            <a:schemeClr val="accent1"/>
+          </a:fillRef>
+          <a:effectRef idx="0">
+            <a:schemeClr val="accent1"/>
+          </a:effectRef>
+          <a:fontRef idx="minor">
+            <a:schemeClr val="lt1"/>
+          </a:fontRef>
+        </p:style>
+        <p:txBody>
+          <a:bodyPr rtlCol="0" anchor="ctr"/>
+          <a:lstStyle/>
+          <a:p>
+            <a:pPr algn="ctr"/>
+            <a:endParaRPr lang="en-US"/>
+          </a:p>
+        </p:txBody>
+      </p:sp>
+      <p:sp>
+        <p:nvSpPr>
+          <p:cNvPr id="4" name="TextBox 3">
+            <a:extLst>
+              <a:ext uri="{FF2B5EF4-FFF2-40B4-BE49-F238E27FC236}">
+                <a16:creationId xmlns:a16="http://schemas.microsoft.com/office/drawing/2014/main" id="{1FBAFC7F-91FD-35A4-944B-49CC92E67268}"/>
               </a:ext>
             </a:extLst>
           </p:cNvPr>
@@ -2248,45 +2455,8 @@
         </p:nvSpPr>
         <p:spPr>
           <a:xfrm>
-            <a:off x="3910263" y="911641"/>
-            <a:ext cx="5967663" cy="1446550"/>
-          </a:xfrm>
-          <a:prstGeom prst="rect">
-            <a:avLst/>
-          </a:prstGeom>
-          <a:noFill/>
-        </p:spPr>
-        <p:txBody>
-          <a:bodyPr wrap="square" rtlCol="0">
-            <a:spAutoFit/>
-          </a:bodyPr>
-          <a:lstStyle/>
-          <a:p>
-            <a:pPr algn="ctr"/>
-            <a:r>
-              <a:rPr lang="fr-BE" sz="8800" b="1" dirty="0" err="1"/>
-              <a:t>Demo</a:t>
-            </a:r>
-            <a:endParaRPr lang="en-BE" sz="8800" b="1" dirty="0"/>
-          </a:p>
-        </p:txBody>
-      </p:sp>
-      <p:sp>
-        <p:nvSpPr>
-          <p:cNvPr id="19" name="TextBox 18">
-            <a:extLst>
-              <a:ext uri="{FF2B5EF4-FFF2-40B4-BE49-F238E27FC236}">
-                <a16:creationId xmlns:a16="http://schemas.microsoft.com/office/drawing/2014/main" id="{B2422310-8A6C-A0AA-4AAA-F1F276FBEB87}"/>
-              </a:ext>
-            </a:extLst>
-          </p:cNvPr>
-          <p:cNvSpPr txBox="1"/>
-          <p:nvPr/>
-        </p:nvSpPr>
-        <p:spPr>
-          <a:xfrm>
-            <a:off x="3176336" y="3507214"/>
-            <a:ext cx="9781674" cy="661720"/>
+            <a:off x="421105" y="240632"/>
+            <a:ext cx="2394284" cy="584775"/>
           </a:xfrm>
           <a:prstGeom prst="rect">
             <a:avLst/>
@@ -2300,27 +2470,97 @@
           <a:lstStyle/>
           <a:p>
             <a:r>
-              <a:rPr lang="en-US" dirty="0">
+              <a:rPr lang="fr-BE" sz="3200" b="1" dirty="0">
                 <a:solidFill>
-                  <a:srgbClr val="3D3838"/>
+                  <a:schemeClr val="bg1"/>
                 </a:solidFill>
-                <a:latin typeface="Source Sans 3" pitchFamily="34" charset="0"/>
-                <a:ea typeface="Source Sans 3" pitchFamily="34" charset="-122"/>
-                <a:cs typeface="Source Sans 3" pitchFamily="34" charset="-120"/>
               </a:rPr>
-              <a:t>Power BI Service → Apps → Get Apps → Search "Microsoft Fabric Capacity Metrics"</a:t>
+              <a:t>LACO /</a:t>
+            </a:r>
+            <a:endParaRPr lang="en-BE" sz="3200" b="1" dirty="0">
+              <a:solidFill>
+                <a:schemeClr val="bg1"/>
+              </a:solidFill>
+            </a:endParaRPr>
+          </a:p>
+        </p:txBody>
+      </p:sp>
+      <p:pic>
+        <p:nvPicPr>
+          <p:cNvPr id="7" name="Picture 6">
+            <a:extLst>
+              <a:ext uri="{FF2B5EF4-FFF2-40B4-BE49-F238E27FC236}">
+                <a16:creationId xmlns:a16="http://schemas.microsoft.com/office/drawing/2014/main" id="{C4EA1EE5-D4E6-0A7E-7E1D-82A9E123E661}"/>
+              </a:ext>
+            </a:extLst>
+          </p:cNvPr>
+          <p:cNvPicPr>
+            <a:picLocks noChangeAspect="1"/>
+          </p:cNvPicPr>
+          <p:nvPr/>
+        </p:nvPicPr>
+        <p:blipFill>
+          <a:blip r:embed="rId2"/>
+          <a:stretch>
+            <a:fillRect/>
+          </a:stretch>
+        </p:blipFill>
+        <p:spPr>
+          <a:xfrm>
+            <a:off x="537216" y="742479"/>
+            <a:ext cx="13555967" cy="6744641"/>
+          </a:xfrm>
+          <a:prstGeom prst="rect">
+            <a:avLst/>
+          </a:prstGeom>
+        </p:spPr>
+      </p:pic>
+      <p:sp>
+        <p:nvSpPr>
+          <p:cNvPr id="10" name="TextBox 9">
+            <a:extLst>
+              <a:ext uri="{FF2B5EF4-FFF2-40B4-BE49-F238E27FC236}">
+                <a16:creationId xmlns:a16="http://schemas.microsoft.com/office/drawing/2014/main" id="{6D45849E-EBD0-06C7-9E65-D10C03216F39}"/>
+              </a:ext>
+            </a:extLst>
+          </p:cNvPr>
+          <p:cNvSpPr txBox="1"/>
+          <p:nvPr/>
+        </p:nvSpPr>
+        <p:spPr>
+          <a:xfrm>
+            <a:off x="3388532" y="4898370"/>
+            <a:ext cx="7315200" cy="369332"/>
+          </a:xfrm>
+          <a:prstGeom prst="rect">
+            <a:avLst/>
+          </a:prstGeom>
+          <a:noFill/>
+        </p:spPr>
+        <p:txBody>
+          <a:bodyPr wrap="square">
+            <a:spAutoFit/>
+          </a:bodyPr>
+          <a:lstStyle/>
+          <a:p>
+            <a:r>
+              <a:rPr lang="en-GB" dirty="0">
+                <a:hlinkClick r:id="rId3"/>
+              </a:rPr>
+              <a:t>Health (Preview) - Fabric Capacity Metrics – Fabric</a:t>
+            </a:r>
+            <a:r>
+              <a:rPr lang="en-GB" dirty="0"/>
+              <a:t> </a:t>
             </a:r>
             <a:endParaRPr lang="en-US" dirty="0"/>
-          </a:p>
-          <a:p>
-            <a:endParaRPr lang="en-BE" dirty="0"/>
           </a:p>
         </p:txBody>
       </p:sp>
     </p:spTree>
     <p:extLst>
       <p:ext uri="{BB962C8B-B14F-4D97-AF65-F5344CB8AC3E}">
-        <p14:creationId xmlns:p14="http://schemas.microsoft.com/office/powerpoint/2010/main" val="2741792621"/>
+        <p14:creationId xmlns:p14="http://schemas.microsoft.com/office/powerpoint/2010/main" val="4272740349"/>
       </p:ext>
     </p:extLst>
   </p:cSld>
